--- a/slides/decks/s27-myeloma-plasma-cell.pptx
+++ b/slides/decks/s27-myeloma-plasma-cell.pptx
@@ -135,13 +135,13 @@
   <p:extLst>
     <p:ext uri="{521415D9-36F7-43E2-AB2F-B90AF26B5E84}">
       <p14:sectionLst xmlns:p14="http://schemas.microsoft.com/office/powerpoint/2010/main">
-        <p14:section name="Opening" id="{9d531bb0-7fb1-0794-096e-f40e922bdb40}">
+        <p14:section name="Opening" id="{cb205cad-a5d2-c3a3-6866-28671e271567}">
           <p14:sldIdLst>
             <p14:sldId id="256"/>
             <p14:sldId id="257"/>
           </p14:sldIdLst>
         </p14:section>
-        <p14:section name="Myeloma: first line" id="{d9740001-568a-12ce-c53c-12b31a3bcca4}">
+        <p14:section name="Myeloma: first line" id="{ac45da9a-972a-a23c-4a44-be6244cc333b}">
           <p14:sldIdLst>
             <p14:sldId id="258"/>
             <p14:sldId id="259"/>
@@ -151,27 +151,27 @@
             <p14:sldId id="263"/>
           </p14:sldIdLst>
         </p14:section>
-        <p14:section name="Myeloma: relapse" id="{4a01f848-16b7-cd23-06a0-f5a639a908a3}">
+        <p14:section name="Myeloma: relapse" id="{66412553-8418-1310-1e03-58cc2c741abe}">
           <p14:sldIdLst>
             <p14:sldId id="264"/>
             <p14:sldId id="265"/>
           </p14:sldIdLst>
         </p14:section>
-        <p14:section name="AL amyloidosis" id="{a97ec6cc-12ee-0d11-715e-87ad9c9b8c93}">
+        <p14:section name="AL amyloidosis" id="{506f3b3a-f2bc-f2fb-4e4b-0da33c6d847b}">
           <p14:sldIdLst>
             <p14:sldId id="266"/>
             <p14:sldId id="267"/>
             <p14:sldId id="268"/>
           </p14:sldIdLst>
         </p14:section>
-        <p14:section name="POEMS and MIDD" id="{d0d3f830-0197-877f-0c75-108c1e2b7842}">
+        <p14:section name="POEMS and MIDD" id="{42147d15-6742-f1e7-0ba1-daed81b5a278}">
           <p14:sldIdLst>
             <p14:sldId id="269"/>
             <p14:sldId id="270"/>
             <p14:sldId id="271"/>
           </p14:sldIdLst>
         </p14:section>
-        <p14:section name="Board questions" id="{c27314a7-9871-2c7f-3282-67da44538759}">
+        <p14:section name="Board questions" id="{bc34d231-10c5-c805-03a2-a506ae623f44}">
           <p14:sldIdLst>
             <p14:sldId id="272"/>
             <p14:sldId id="273"/>
@@ -181,14 +181,14 @@
             <p14:sldId id="277"/>
           </p14:sldIdLst>
         </p14:section>
-        <p14:section name="References" id="{bbf9af52-cead-01ed-f2ce-121cb4b4c5b4}">
+        <p14:section name="References" id="{2aafd98b-5e3f-a11a-28ce-441bbb9ef298}">
           <p14:sldIdLst>
             <p14:sldId id="278"/>
             <p14:sldId id="279"/>
             <p14:sldId id="280"/>
           </p14:sldIdLst>
         </p14:section>
-        <p14:section name="Backup" id="{82341007-8a88-2241-56df-4201df5ab898}">
+        <p14:section name="Backup" id="{5a8a4f0a-6664-ed61-3fb0-ca9b6c7c8862}">
           <p14:sldIdLst>
             <p14:sldId id="281"/>
             <p14:sldId id="282"/>
@@ -751,6 +751,17 @@
               </a:spcAft>
             </a:pPr>
             <a:r>
+              <a:rPr lang="en-US" dirty="0"/>
+              <a:t>KarMMa-3 和 CARTITUDE-4 的對照組都是標準治療組合，所以 CAR-T 在較早線的優勢是隨機比較出來的，不是單臂資料。考試問 BCMA 是什麼，是 B cell maturation antigen；問哪一個產品 ICANS 比較高，看表上的 9%。</a:t>
+            </a:r>
+          </a:p>
+          <a:p>
+            <a:pPr>
+              <a:spcAft>
+                <a:spcPts val="600"/>
+              </a:spcAft>
+            </a:pPr>
+            <a:r>
               <a:rPr lang="en-US" b="1" dirty="0"/>
               <a:t>講者提醒（不念出來）：</a:t>
             </a:r>
@@ -902,6 +913,17 @@
               <a:t>預後看兩邊。Clone 這邊，骨髓 plasma cell 超過 10%、dFLC 高都比較差；t(11;14) 的病人 high-dose melphalan 效果較好。器官這邊用 Mayo 加 European modification 的心臟分期，NT-proBNP 和 troponin，分 I、II、IIIa、IIIb。治療目標是 VGPR，也就是 dFLC 小於 40 mg/L，或 CR。</a:t>
             </a:r>
           </a:p>
+          <a:p>
+            <a:pPr>
+              <a:spcAft>
+                <a:spcPts val="600"/>
+              </a:spcAft>
+            </a:pPr>
+            <a:r>
+              <a:rPr lang="en-US" dirty="0"/>
+              <a:t>這個 clone 通常很小，可能只是 MGUS 或 smoldering 的大小，所以 work-up 要完整。另外 AL 也可以是侷限型，例如咽喉或膀胱，預後很好、治療方式完全不同，不在這一章的範圍。</a:t>
+            </a:r>
+          </a:p>
         </p:txBody>
       </p:sp>
       <p:sp>
@@ -1038,6 +1060,17 @@
               <a:t>Andromeda 之後，EMA 在 2021 年核准 Dara-CyBorD 加 daratumumab maintenance 用在 stage I、II、IIIa。六個月時心臟反應 41.5% 比 22.2%，腎臟反應 53.0% 比 23.9%。它是多數病人的首選，但 IIIb 被排除在外，這點很常考。可以移植的病人如果血液反應不到 VGPR，仍然可以接 autoHCT。</a:t>
             </a:r>
           </a:p>
+          <a:p>
+            <a:pPr>
+              <a:spcAft>
+                <a:spcPts val="600"/>
+              </a:spcAft>
+            </a:pPr>
+            <a:r>
+              <a:rPr lang="en-US" dirty="0"/>
+              <a:t>器官反應通常落後，會在血液學反應之後逐步出現，所以治療期間要頻繁追蹤血液學反應。除了心臟分期，選方案時還要看年齡、體能、eGFR、neuropathy 和收縮壓。</a:t>
+            </a:r>
+          </a:p>
         </p:txBody>
       </p:sp>
       <p:sp>
@@ -1174,6 +1207,17 @@
               <a:t>結果很好，EBMT 資料中位存活超過 10 年，HOVON 104 的 TRM 是 0，五年 OS 86%。</a:t>
             </a:r>
           </a:p>
+          <a:p>
+            <a:pPr>
+              <a:spcAft>
+                <a:spcPts val="600"/>
+              </a:spcAft>
+            </a:pPr>
+            <a:r>
+              <a:rPr lang="en-US" dirty="0"/>
+              <a:t>這些門檻和 myeloma 很不一樣。Myeloma 洗腎也能做 auto，AL 卻要 eGFR 大於 40；同樣是 melphalan 200，myeloma 腎不好可以降到 140，AL 降劑量就失去意義。兩章對照時這裡最容易考。</a:t>
+            </a:r>
+          </a:p>
         </p:txBody>
       </p:sp>
       <p:sp>
@@ -1310,6 +1354,17 @@
               <a:t>臨床上要和 CIDP 以及 CANOMAD 區分。一個 demyelinating neuropathy 的病人如果有 λ 的小 M-protein 加上 sclerotic lesion，就要抽 VEGF。</a:t>
             </a:r>
           </a:p>
+          <a:p>
+            <a:pPr>
+              <a:spcAft>
+                <a:spcPts val="600"/>
+              </a:spcAft>
+            </a:pPr>
+            <a:r>
+              <a:rPr lang="en-US" dirty="0"/>
+              <a:t>其他線索還有 PEST，papilledema、extravascular volume overload、sclerotic bone lesion、thrombocytosis 或 erythrocytosis，以及肺功能異常和血栓傾向。Castleman variant 如果沒有 plasma cell disorder，要當成另一個疾病。貧血或血小板低在 POEMS 很少見，除非合併 Castleman。</a:t>
+            </a:r>
+          </a:p>
         </p:txBody>
       </p:sp>
       <p:sp>
@@ -1446,6 +1501,17 @@
               <a:t>預後方面，POEMS 是慢性病程，中位存活接近 14 年，很少轉成 myeloma。有 clubbing、extravascular volume overload、呼吸症狀、papilledema 或合併 Castleman 的人存活較短；血液學 CR、albumin 大於 3.2 g/dL、年輕的人較好。</a:t>
             </a:r>
           </a:p>
+          <a:p>
+            <a:pPr>
+              <a:spcAft>
+                <a:spcPts val="600"/>
+              </a:spcAft>
+            </a:pPr>
+            <a:r>
+              <a:rPr lang="en-US" dirty="0"/>
+              <a:t>反應評估也很特別。M-protein 很小，myeloma 的反應標準不適用，VEGF 又和疾病活性不完全一致，所以書上建議同時看四個面向，modified amyloid 血液學反應、VEGF、CT/PET，以及神經、肺功能和水腫的器官反應。</a:t>
+            </a:r>
+          </a:p>
         </p:txBody>
       </p:sp>
       <p:sp>
@@ -1589,6 +1655,17 @@
               </a:spcAft>
             </a:pPr>
             <a:r>
+              <a:rPr lang="en-US" dirty="0"/>
+              <a:t>考試如果給一個腎臟切片，nodular glomerulosclerosis、κ 沉積、Congo red 陰性，答案是 light-chain deposition disease，不是 AL amyloidosis。POEMS 移植後血液學 CR 大約三個月看得到，PET/CT 的反應可能要等到 12 個月。</a:t>
+            </a:r>
+          </a:p>
+          <a:p>
+            <a:pPr>
+              <a:spcAft>
+                <a:spcPts val="600"/>
+              </a:spcAft>
+            </a:pPr>
+            <a:r>
               <a:rPr lang="en-US" b="1" dirty="0"/>
               <a:t>講者提醒（不念出來）：</a:t>
             </a:r>
@@ -1725,6 +1802,17 @@
               </a:spcAft>
             </a:pPr>
             <a:r>
+              <a:rPr lang="en-US" dirty="0"/>
+              <a:t>想一想 del(17p) 在前面哪一張表出現過，書上對這群人有特別的建議。</a:t>
+            </a:r>
+          </a:p>
+          <a:p>
+            <a:pPr>
+              <a:spcAft>
+                <a:spcPts val="600"/>
+              </a:spcAft>
+            </a:pPr>
+            <a:r>
               <a:rPr lang="en-US" b="1" dirty="0"/>
               <a:t>[Pause for answers.]</a:t>
             </a:r>
@@ -1854,6 +1942,17 @@
               <a:t>選項裡刻意沒有 consolidation，因為 EMN02 的 VRD consolidation 在 high-risk cytogenetics 沒有改善 PFS。</a:t>
             </a:r>
           </a:p>
+          <a:p>
+            <a:pPr>
+              <a:spcAft>
+                <a:spcPts val="600"/>
+              </a:spcAft>
+            </a:pPr>
+            <a:r>
+              <a:rPr lang="en-US" dirty="0"/>
+              <a:t>Lenalidomide maintenance 在 meta-analysis 的各個 subgroup 都改善 PFS，死亡風險下降 25%，所以 high-risk 也不能省略。</a:t>
+            </a:r>
+          </a:p>
         </p:txBody>
       </p:sp>
       <p:sp>
@@ -1975,6 +2074,17 @@
               </a:spcAft>
             </a:pPr>
             <a:r>
+              <a:rPr lang="en-US" dirty="0"/>
+              <a:t>這題的數字很多，先把心臟分期和 auto 的門檻對一對，再看哪一個選項符合 Table 82.1。</a:t>
+            </a:r>
+          </a:p>
+          <a:p>
+            <a:pPr>
+              <a:spcAft>
+                <a:spcPts val="600"/>
+              </a:spcAft>
+            </a:pPr>
+            <a:r>
               <a:rPr lang="en-US" b="1" dirty="0"/>
               <a:t>[Pause for answers.]</a:t>
             </a:r>
@@ -2104,6 +2214,17 @@
               <a:t>第三段是三個比較少見、但很愛考的疾病。AL amyloidosis 的重點是心臟分期決定治療強度；POEMS 的重點是診斷條件和移植後的 engraftment syndrome；MIDD 則看腎臟。最後三題，各對應一個疾病。</a:t>
             </a:r>
           </a:p>
+          <a:p>
+            <a:pPr>
+              <a:spcAft>
+                <a:spcPts val="600"/>
+              </a:spcAft>
+            </a:pPr>
+            <a:r>
+              <a:rPr lang="en-US" dirty="0"/>
+              <a:t>這三章篇幅都不長，所以今天會把書上的表格、劑量和 trial 名稱盡量放進來，三題也都直接從這三章出。</a:t>
+            </a:r>
+          </a:p>
         </p:txBody>
       </p:sp>
       <p:sp>
@@ -2218,6 +2339,17 @@
               <a:t>C 是最主要的陷阱。Dara-CyBorD 是多數病人的首選，但 Andromeda 排除了 IIIb，EMA 的核准也只到 IIIa。A 和 B 都不行，NYHA III、NT-proBNP 超過 5000、收縮壓低於 90，三項都超出 auto 的條件；而且書上說 melphalan 降劑量反應和 PFS 都比較差，不是解決辦法。E 的 allo 只在 auto 之後復發、60 歲以下、器官功能保留的人討論。</a:t>
             </a:r>
           </a:p>
+          <a:p>
+            <a:pPr>
+              <a:spcAft>
+                <a:spcPts val="600"/>
+              </a:spcAft>
+            </a:pPr>
+            <a:r>
+              <a:rPr lang="en-US" dirty="0"/>
+              <a:t>如果同一位病人是 stage II，答案就變成全劑量 Dara-CyBorD；要到 stage I、而且符合心臟門檻，才考慮 melphalan 200 加 auto。</a:t>
+            </a:r>
+          </a:p>
         </p:txBody>
       </p:sp>
       <p:sp>
@@ -2339,6 +2471,17 @@
               </a:spcAft>
             </a:pPr>
             <a:r>
+              <a:rPr lang="en-US" dirty="0"/>
+              <a:t>注意發生的時間點和動員方式，這兩個細節書上都寫過；選項裡有兩個是其他移植或細胞治療併發症的藥。</a:t>
+            </a:r>
+          </a:p>
+          <a:p>
+            <a:pPr>
+              <a:spcAft>
+                <a:spcPts val="600"/>
+              </a:spcAft>
+            </a:pPr>
+            <a:r>
               <a:rPr lang="en-US" b="1" dirty="0"/>
               <a:t>[Pause for answers.]</a:t>
             </a:r>
@@ -2468,6 +2611,17 @@
               <a:t>還有一個預防的考點，用 cyclophosphamide 加 G-CSF 動員可以降低 engraftment syndrome，這位病人只用 G-CSF，風險就比較高。</a:t>
             </a:r>
           </a:p>
+          <a:p>
+            <a:pPr>
+              <a:spcAft>
+                <a:spcPts val="600"/>
+              </a:spcAft>
+            </a:pPr>
+            <a:r>
+              <a:rPr lang="en-US" dirty="0"/>
+              <a:t>Engraftment syndrome 發生時，輸血需求會比預期高，植入也會延遲，這也是書上提醒要早點認出、早點處理的原因。</a:t>
+            </a:r>
+          </a:p>
         </p:txBody>
       </p:sp>
       <p:sp>
@@ -3209,6 +3363,17 @@
               <a:t>最後一列是 conditioning。標準是 IV melphalan 200 mg/m²，換成 busulfan 毒性比較高又沒有勝出，加 bortezomib 也沒有好處，加 bendamustine 還在研究。所以記兩個數字就好，標準 200，年紀大或腎不好用 140。</a:t>
             </a:r>
           </a:p>
+          <a:p>
+            <a:pPr>
+              <a:spcAft>
+                <a:spcPts val="600"/>
+              </a:spcAft>
+            </a:pPr>
+            <a:r>
+              <a:rPr lang="en-US" dirty="0"/>
+              <a:t>病房實務上，評估的重點是 fitness 而不是年齡；六十多歲、體能好、只有輕度腎功能不全的病人，都應該轉介做移植評估。</a:t>
+            </a:r>
+          </a:p>
         </p:txBody>
       </p:sp>
       <p:sp>
@@ -3352,6 +3517,17 @@
               </a:spcAft>
             </a:pPr>
             <a:r>
+              <a:rPr lang="en-US" dirty="0"/>
+              <a:t>臨床上診斷時就要送 FISH 和 LDH，否則 R-ISS 和 R2-ISS 都算不出來。這些分期後面會用來決定誰需要 tandem AHCT，R-ISS 3 和 high-risk FISH 正是書上建議考慮第二次移植的族群。</a:t>
+            </a:r>
+          </a:p>
+          <a:p>
+            <a:pPr>
+              <a:spcAft>
+                <a:spcPts val="600"/>
+              </a:spcAft>
+            </a:pPr>
+            <a:r>
               <a:rPr lang="en-US" b="1" dirty="0"/>
               <a:t>講者提醒（不念出來）：</a:t>
             </a:r>
@@ -3503,6 +3679,17 @@
               <a:t>所以 key point 寫至少 triplet，最好是含 anti-CD38 的 quadruplet。</a:t>
             </a:r>
           </a:p>
+          <a:p>
+            <a:pPr>
+              <a:spcAft>
+                <a:spcPts val="600"/>
+              </a:spcAft>
+            </a:pPr>
+            <a:r>
+              <a:rPr lang="en-US" dirty="0"/>
+              <a:t>書上提到的新 phase 3 設計，多半是四個 cycle induction、AHCT、再兩個 cycle consolidation。考題問 induction 至少要幾個藥，答案是三個；問最理想的組合，是加上 anti-CD38 的四藥。</a:t>
+            </a:r>
+          </a:p>
         </p:txBody>
       </p:sp>
       <p:sp>
@@ -3646,6 +3833,17 @@
               </a:spcAft>
             </a:pPr>
             <a:r>
+              <a:rPr lang="en-US" dirty="0"/>
+              <a:t>EMN02 的對照組不是新藥組合，而是 VMP，也就是 bortezomib、melphalan、prednisone，所以 PFS 差距最大，五年 OS 也是移植組數字較高。讀這張表要看清楚對照組用了什麼、maintenance 給多久，才不會把不同 trial 的數字混在一起比。</a:t>
+            </a:r>
+          </a:p>
+          <a:p>
+            <a:pPr>
+              <a:spcAft>
+                <a:spcPts val="600"/>
+              </a:spcAft>
+            </a:pPr>
+            <a:r>
               <a:rPr lang="en-US" b="1" dirty="0"/>
               <a:t>講者提醒（不念出來）：</a:t>
             </a:r>
@@ -3804,6 +4002,17 @@
               </a:spcAft>
             </a:pPr>
             <a:r>
+              <a:rPr lang="en-US" dirty="0"/>
+              <a:t>StaMINA 三組 38 個月 PFS 是 59%、58%、54%，六年 OS 73% 到 76%，幾乎重疊。三成病人沒有接受第二次移植，ITT 分析自然會稀釋 tandem 的效果，這是解讀兩個 trial 差異時要記得的背景。</a:t>
+            </a:r>
+          </a:p>
+          <a:p>
+            <a:pPr>
+              <a:spcAft>
+                <a:spcPts val="600"/>
+              </a:spcAft>
+            </a:pPr>
+            <a:r>
               <a:rPr lang="en-US" b="1" dirty="0"/>
               <a:t>講者提醒（不念出來）：</a:t>
             </a:r>
@@ -3955,6 +4164,17 @@
               <a:t>Bortezomib maintenance 改善 PFS 不改善 OS，又要皮下注射。Ixazomib 只多 5 個月 PFS，沒有在這個情境核准。Anti-CD38 加 lenalidomide 的 phase 3 結果還在等。</a:t>
             </a:r>
           </a:p>
+          <a:p>
+            <a:pPr>
+              <a:spcAft>
+                <a:spcPts val="600"/>
+              </a:spcAft>
+            </a:pPr>
+            <a:r>
+              <a:rPr lang="en-US" dirty="0"/>
+              <a:t>病房常被問 lenalidomide 要吃多久。目前核准的是用到惡化或無法耐受，但因為成本和第二癌，最佳時間仍是開放問題。考試若問哪一個 maintenance 同時改善 PFS 和 OS，只有 lenalidomide。</a:t>
+            </a:r>
+          </a:p>
         </p:txBody>
       </p:sp>
       <p:sp>
@@ -4089,6 +4309,17 @@
             <a:r>
               <a:rPr lang="en-US" dirty="0"/>
               <a:t>第四條是黑色那一格，BCMA CAR-T，下一張看數字。</a:t>
+            </a:r>
+          </a:p>
+          <a:p>
+            <a:pPr>
+              <a:spcAft>
+                <a:spcPts val="600"/>
+              </a:spcAft>
+            </a:pPr>
+            <a:r>
+              <a:rPr lang="en-US" dirty="0"/>
+              <a:t>Myeloma X 的對照組是復發後 VAD 再 induction，接每週 cyclophosphamide 400 mg/m² 共 12 週，比的是傳統化療。ReLApsE 的對照是現代的 Rd，移植就沒有勝出，新藥時代 salvage AHCT 的空間因此變小。</a:t>
             </a:r>
           </a:p>
         </p:txBody>

--- a/slides/decks/s27-myeloma-plasma-cell.pptx
+++ b/slides/decks/s27-myeloma-plasma-cell.pptx
@@ -135,13 +135,13 @@
   <p:extLst>
     <p:ext uri="{521415D9-36F7-43E2-AB2F-B90AF26B5E84}">
       <p14:sectionLst xmlns:p14="http://schemas.microsoft.com/office/powerpoint/2010/main">
-        <p14:section name="Opening" id="{cb205cad-a5d2-c3a3-6866-28671e271567}">
+        <p14:section name="Opening" id="{8cd8d8c5-ee87-5e0d-e403-500ea08dc892}">
           <p14:sldIdLst>
             <p14:sldId id="256"/>
             <p14:sldId id="257"/>
           </p14:sldIdLst>
         </p14:section>
-        <p14:section name="Myeloma: first line" id="{ac45da9a-972a-a23c-4a44-be6244cc333b}">
+        <p14:section name="Myeloma: first line" id="{d12ac1a4-9b58-1603-0a72-79bdbfc1295a}">
           <p14:sldIdLst>
             <p14:sldId id="258"/>
             <p14:sldId id="259"/>
@@ -151,27 +151,27 @@
             <p14:sldId id="263"/>
           </p14:sldIdLst>
         </p14:section>
-        <p14:section name="Myeloma: relapse" id="{66412553-8418-1310-1e03-58cc2c741abe}">
+        <p14:section name="Myeloma: relapse" id="{7cb8fe90-4063-ae7a-6fcf-ef4ce463f8eb}">
           <p14:sldIdLst>
             <p14:sldId id="264"/>
             <p14:sldId id="265"/>
           </p14:sldIdLst>
         </p14:section>
-        <p14:section name="AL amyloidosis" id="{506f3b3a-f2bc-f2fb-4e4b-0da33c6d847b}">
+        <p14:section name="AL amyloidosis" id="{5feb3146-4ec0-391f-64df-dc2690c34585}">
           <p14:sldIdLst>
             <p14:sldId id="266"/>
             <p14:sldId id="267"/>
             <p14:sldId id="268"/>
           </p14:sldIdLst>
         </p14:section>
-        <p14:section name="POEMS and MIDD" id="{42147d15-6742-f1e7-0ba1-daed81b5a278}">
+        <p14:section name="POEMS and MIDD" id="{63e3febd-a07b-181f-ac89-b1719c7c9778}">
           <p14:sldIdLst>
             <p14:sldId id="269"/>
             <p14:sldId id="270"/>
             <p14:sldId id="271"/>
           </p14:sldIdLst>
         </p14:section>
-        <p14:section name="Board questions" id="{bc34d231-10c5-c805-03a2-a506ae623f44}">
+        <p14:section name="Board questions" id="{2c9a3352-eef1-eb2e-e377-d69d66f162af}">
           <p14:sldIdLst>
             <p14:sldId id="272"/>
             <p14:sldId id="273"/>
@@ -181,14 +181,14 @@
             <p14:sldId id="277"/>
           </p14:sldIdLst>
         </p14:section>
-        <p14:section name="References" id="{2aafd98b-5e3f-a11a-28ce-441bbb9ef298}">
+        <p14:section name="References" id="{20a67a33-81de-ecd7-7741-93347850003f}">
           <p14:sldIdLst>
             <p14:sldId id="278"/>
             <p14:sldId id="279"/>
             <p14:sldId id="280"/>
           </p14:sldIdLst>
         </p14:section>
-        <p14:section name="Backup" id="{5a8a4f0a-6664-ed61-3fb0-ca9b6c7c8862}">
+        <p14:section name="Backup" id="{01e4a464-b919-03c2-891c-988a5c65699d}">
           <p14:sldIdLst>
             <p14:sldId id="281"/>
             <p14:sldId id="282"/>
@@ -6998,7 +6998,7 @@
         </p:nvSpPr>
         <p:spPr>
           <a:xfrm>
-            <a:off x="685800" y="4343400"/>
+            <a:off x="685800" y="4892040"/>
             <a:ext cx="10817352" cy="411480"/>
           </a:xfrm>
           <a:prstGeom prst="rect">
@@ -10380,7 +10380,7 @@
         </p:nvSpPr>
         <p:spPr>
           <a:xfrm>
-            <a:off x="685800" y="4572000"/>
+            <a:off x="685800" y="4800600"/>
             <a:ext cx="10817352" cy="411480"/>
           </a:xfrm>
           <a:prstGeom prst="rect">
@@ -18221,7 +18221,7 @@
                             <a:schemeClr val="tx1"/>
                           </a:solidFill>
                         </a:rPr>
-                        <a:t>13 vs 11.4 y, early vs deferred</a:t>
+                        <a:t>Median 13 vs 11.4 y *</a:t>
                       </a:r>
                       <a:endParaRPr lang="en-US" sz="1500" dirty="0"/>
                     </a:p>
@@ -18260,7 +18260,7 @@
         </p:nvSpPr>
         <p:spPr>
           <a:xfrm>
-            <a:off x="685800" y="3931920"/>
+            <a:off x="685800" y="4206240"/>
             <a:ext cx="10817352" cy="411480"/>
           </a:xfrm>
           <a:prstGeom prst="rect">
@@ -18282,7 +18282,7 @@
                   <a:schemeClr val="tx1"/>
                 </a:solidFill>
               </a:rPr>
-              <a:t>D’Souza figures for the 2007–2012 cohort. EBMT registry (1993–2021): median OS &gt; 10 years. Induction before HCT gives better hematologic responses (Gustine 2022).</a:t>
+              <a:t>* Early vs deferred auto-HCT. D’Souza figures: 2007–2012 cohort. EBMT registry (1993–2021): median OS &gt; 10 years. Induction before HCT gives better hematologic responses (Gustine 2022).</a:t>
             </a:r>
             <a:endParaRPr lang="en-US" sz="1600" dirty="0"/>
           </a:p>

--- a/slides/decks/s27-myeloma-plasma-cell.pptx
+++ b/slides/decks/s27-myeloma-plasma-cell.pptx
@@ -135,13 +135,13 @@
   <p:extLst>
     <p:ext uri="{521415D9-36F7-43E2-AB2F-B90AF26B5E84}">
       <p14:sectionLst xmlns:p14="http://schemas.microsoft.com/office/powerpoint/2010/main">
-        <p14:section name="Opening" id="{8cd8d8c5-ee87-5e0d-e403-500ea08dc892}">
+        <p14:section name="Opening" id="{622b4e57-3368-05fb-eeb0-2a6bd5a4f809}">
           <p14:sldIdLst>
             <p14:sldId id="256"/>
             <p14:sldId id="257"/>
           </p14:sldIdLst>
         </p14:section>
-        <p14:section name="Myeloma: first line" id="{d12ac1a4-9b58-1603-0a72-79bdbfc1295a}">
+        <p14:section name="Myeloma: first line" id="{a25228e6-80eb-d79c-aa06-c9bfc9846235}">
           <p14:sldIdLst>
             <p14:sldId id="258"/>
             <p14:sldId id="259"/>
@@ -151,27 +151,27 @@
             <p14:sldId id="263"/>
           </p14:sldIdLst>
         </p14:section>
-        <p14:section name="Myeloma: relapse" id="{7cb8fe90-4063-ae7a-6fcf-ef4ce463f8eb}">
+        <p14:section name="Myeloma: relapse" id="{365ecb55-f7be-3964-bf46-67fc725c19fe}">
           <p14:sldIdLst>
             <p14:sldId id="264"/>
             <p14:sldId id="265"/>
           </p14:sldIdLst>
         </p14:section>
-        <p14:section name="AL amyloidosis" id="{5feb3146-4ec0-391f-64df-dc2690c34585}">
+        <p14:section name="AL amyloidosis" id="{f2744f20-d5ee-f1b3-82bf-d660ac357dcb}">
           <p14:sldIdLst>
             <p14:sldId id="266"/>
             <p14:sldId id="267"/>
             <p14:sldId id="268"/>
           </p14:sldIdLst>
         </p14:section>
-        <p14:section name="POEMS and MIDD" id="{63e3febd-a07b-181f-ac89-b1719c7c9778}">
+        <p14:section name="POEMS and MIDD" id="{aa06eec0-43ad-6117-d6fd-4c2ce5716e7b}">
           <p14:sldIdLst>
             <p14:sldId id="269"/>
             <p14:sldId id="270"/>
             <p14:sldId id="271"/>
           </p14:sldIdLst>
         </p14:section>
-        <p14:section name="Board questions" id="{2c9a3352-eef1-eb2e-e377-d69d66f162af}">
+        <p14:section name="Board questions" id="{d61ab963-8b5f-889c-e11e-4e64a72d79a4}">
           <p14:sldIdLst>
             <p14:sldId id="272"/>
             <p14:sldId id="273"/>
@@ -181,14 +181,14 @@
             <p14:sldId id="277"/>
           </p14:sldIdLst>
         </p14:section>
-        <p14:section name="References" id="{20a67a33-81de-ecd7-7741-93347850003f}">
+        <p14:section name="References" id="{423aa191-9c08-698a-a1f9-8d4d9f566e20}">
           <p14:sldIdLst>
             <p14:sldId id="278"/>
             <p14:sldId id="279"/>
             <p14:sldId id="280"/>
           </p14:sldIdLst>
         </p14:section>
-        <p14:section name="Backup" id="{01e4a464-b919-03c2-891c-988a5c65699d}">
+        <p14:section name="Backup" id="{8289f5e7-3c36-a213-4206-0a2e5f3c4aa2}">
           <p14:sldIdLst>
             <p14:sldId id="281"/>
             <p14:sldId id="282"/>
@@ -10380,7 +10380,7 @@
         </p:nvSpPr>
         <p:spPr>
           <a:xfrm>
-            <a:off x="685800" y="4800600"/>
+            <a:off x="685800" y="5029200"/>
             <a:ext cx="10817352" cy="411480"/>
           </a:xfrm>
           <a:prstGeom prst="rect">

--- a/slides/decks/s27-myeloma-plasma-cell.pptx
+++ b/slides/decks/s27-myeloma-plasma-cell.pptx
@@ -135,13 +135,13 @@
   <p:extLst>
     <p:ext uri="{521415D9-36F7-43E2-AB2F-B90AF26B5E84}">
       <p14:sectionLst xmlns:p14="http://schemas.microsoft.com/office/powerpoint/2010/main">
-        <p14:section name="Opening" id="{622b4e57-3368-05fb-eeb0-2a6bd5a4f809}">
+        <p14:section name="Opening" id="{da69ca4a-194d-0853-eead-4fbbc9300abf}">
           <p14:sldIdLst>
             <p14:sldId id="256"/>
             <p14:sldId id="257"/>
           </p14:sldIdLst>
         </p14:section>
-        <p14:section name="Myeloma: first line" id="{a25228e6-80eb-d79c-aa06-c9bfc9846235}">
+        <p14:section name="Myeloma: first line" id="{64dfc4c4-e10c-519f-8d38-5506ec0c13d6}">
           <p14:sldIdLst>
             <p14:sldId id="258"/>
             <p14:sldId id="259"/>
@@ -151,27 +151,27 @@
             <p14:sldId id="263"/>
           </p14:sldIdLst>
         </p14:section>
-        <p14:section name="Myeloma: relapse" id="{365ecb55-f7be-3964-bf46-67fc725c19fe}">
+        <p14:section name="Myeloma: relapse" id="{15b17bc4-4b2a-8fc6-ed7d-8e76aa9d6f17}">
           <p14:sldIdLst>
             <p14:sldId id="264"/>
             <p14:sldId id="265"/>
           </p14:sldIdLst>
         </p14:section>
-        <p14:section name="AL amyloidosis" id="{f2744f20-d5ee-f1b3-82bf-d660ac357dcb}">
+        <p14:section name="AL amyloidosis" id="{c897ebf6-e01f-acc3-7503-28d57e65d670}">
           <p14:sldIdLst>
             <p14:sldId id="266"/>
             <p14:sldId id="267"/>
             <p14:sldId id="268"/>
           </p14:sldIdLst>
         </p14:section>
-        <p14:section name="POEMS and MIDD" id="{aa06eec0-43ad-6117-d6fd-4c2ce5716e7b}">
+        <p14:section name="POEMS and MIDD" id="{1895eb02-5e30-964f-687b-7f4745cfb7a0}">
           <p14:sldIdLst>
             <p14:sldId id="269"/>
             <p14:sldId id="270"/>
             <p14:sldId id="271"/>
           </p14:sldIdLst>
         </p14:section>
-        <p14:section name="Board questions" id="{d61ab963-8b5f-889c-e11e-4e64a72d79a4}">
+        <p14:section name="Board questions" id="{68d65e1d-993a-f86d-6147-ec9a90fc767d}">
           <p14:sldIdLst>
             <p14:sldId id="272"/>
             <p14:sldId id="273"/>
@@ -181,14 +181,14 @@
             <p14:sldId id="277"/>
           </p14:sldIdLst>
         </p14:section>
-        <p14:section name="References" id="{423aa191-9c08-698a-a1f9-8d4d9f566e20}">
+        <p14:section name="References" id="{0b671a7b-911a-51b1-6726-b9d390457654}">
           <p14:sldIdLst>
             <p14:sldId id="278"/>
             <p14:sldId id="279"/>
             <p14:sldId id="280"/>
           </p14:sldIdLst>
         </p14:section>
-        <p14:section name="Backup" id="{8289f5e7-3c36-a213-4206-0a2e5f3c4aa2}">
+        <p14:section name="Backup" id="{a69154fc-3af2-8070-e060-278759d6938f}">
           <p14:sldIdLst>
             <p14:sldId id="281"/>
             <p14:sldId id="282"/>
@@ -23918,7 +23918,7 @@
         </p:nvSpPr>
         <p:spPr>
           <a:xfrm>
-            <a:off x="685800" y="4709160"/>
+            <a:off x="685800" y="4526280"/>
             <a:ext cx="10817352" cy="411480"/>
           </a:xfrm>
           <a:prstGeom prst="rect">
@@ -24919,7 +24919,7 @@
         </p:nvSpPr>
         <p:spPr>
           <a:xfrm>
-            <a:off x="685800" y="4800600"/>
+            <a:off x="685800" y="4709160"/>
             <a:ext cx="10817352" cy="411480"/>
           </a:xfrm>
           <a:prstGeom prst="rect">
@@ -25920,7 +25920,7 @@
         </p:nvSpPr>
         <p:spPr>
           <a:xfrm>
-            <a:off x="685800" y="4480560"/>
+            <a:off x="685800" y="4617720"/>
             <a:ext cx="10817352" cy="411480"/>
           </a:xfrm>
           <a:prstGeom prst="rect">

--- a/slides/decks/s27-myeloma-plasma-cell.pptx
+++ b/slides/decks/s27-myeloma-plasma-cell.pptx
@@ -135,13 +135,13 @@
   <p:extLst>
     <p:ext uri="{521415D9-36F7-43E2-AB2F-B90AF26B5E84}">
       <p14:sectionLst xmlns:p14="http://schemas.microsoft.com/office/powerpoint/2010/main">
-        <p14:section name="Opening" id="{da69ca4a-194d-0853-eead-4fbbc9300abf}">
+        <p14:section name="Opening" id="{3db0ee06-9519-3e10-1db4-60b6ba5a999c}">
           <p14:sldIdLst>
             <p14:sldId id="256"/>
             <p14:sldId id="257"/>
           </p14:sldIdLst>
         </p14:section>
-        <p14:section name="Myeloma: first line" id="{64dfc4c4-e10c-519f-8d38-5506ec0c13d6}">
+        <p14:section name="Myeloma: first line" id="{2e6a7257-a7bf-cfef-d69f-1a433968fdcd}">
           <p14:sldIdLst>
             <p14:sldId id="258"/>
             <p14:sldId id="259"/>
@@ -151,27 +151,27 @@
             <p14:sldId id="263"/>
           </p14:sldIdLst>
         </p14:section>
-        <p14:section name="Myeloma: relapse" id="{15b17bc4-4b2a-8fc6-ed7d-8e76aa9d6f17}">
+        <p14:section name="Myeloma: relapse" id="{f35d7b79-2303-951c-4d21-2ae37d81f7d1}">
           <p14:sldIdLst>
             <p14:sldId id="264"/>
             <p14:sldId id="265"/>
           </p14:sldIdLst>
         </p14:section>
-        <p14:section name="AL amyloidosis" id="{c897ebf6-e01f-acc3-7503-28d57e65d670}">
+        <p14:section name="AL amyloidosis" id="{d735357e-af3c-a882-5b6a-8f1d095b58c2}">
           <p14:sldIdLst>
             <p14:sldId id="266"/>
             <p14:sldId id="267"/>
             <p14:sldId id="268"/>
           </p14:sldIdLst>
         </p14:section>
-        <p14:section name="POEMS and MIDD" id="{1895eb02-5e30-964f-687b-7f4745cfb7a0}">
+        <p14:section name="POEMS and MIDD" id="{248b3bad-85ca-578f-f28a-683281d0fd08}">
           <p14:sldIdLst>
             <p14:sldId id="269"/>
             <p14:sldId id="270"/>
             <p14:sldId id="271"/>
           </p14:sldIdLst>
         </p14:section>
-        <p14:section name="Board questions" id="{68d65e1d-993a-f86d-6147-ec9a90fc767d}">
+        <p14:section name="Board questions" id="{2d059c99-d025-abff-81de-9bc21afc5789}">
           <p14:sldIdLst>
             <p14:sldId id="272"/>
             <p14:sldId id="273"/>
@@ -181,14 +181,14 @@
             <p14:sldId id="277"/>
           </p14:sldIdLst>
         </p14:section>
-        <p14:section name="References" id="{0b671a7b-911a-51b1-6726-b9d390457654}">
+        <p14:section name="References" id="{577c9182-0645-6bd0-01b0-aef1ea8cf9df}">
           <p14:sldIdLst>
             <p14:sldId id="278"/>
             <p14:sldId id="279"/>
             <p14:sldId id="280"/>
           </p14:sldIdLst>
         </p14:section>
-        <p14:section name="Backup" id="{a69154fc-3af2-8070-e060-278759d6938f}">
+        <p14:section name="Backup" id="{dbce1548-9c6a-a233-25da-fa62dd4c57b8}">
           <p14:sldIdLst>
             <p14:sldId id="281"/>
             <p14:sldId id="282"/>
@@ -14789,7 +14789,7 @@
                   <a:schemeClr val="tx1"/>
                 </a:solidFill>
               </a:rPr>
-              <a:t>A 54-year-old man with POEMS syndrome (demyelinating polyneuropathy, IgA-λ, sclerotic bone lesions, high VEGF) had lenalidomide-dexamethasone, G-CSF-only mobilization and MEL 200 mg/m² auto-HCT. On day +9, as neutrophils recover, he has fever, rash, weight gain and bilateral lung infiltrates; cultures are negative. Best next step?</a:t>
+              <a:t>A 54-year-old man with POEMS syndrome (demyelinating polyneuropathy, IgA-λ, sclerotic bone lesions, high VEGF) had lenalidomide-dexamethasone, G-CSF-only mobilization and MEL 200 mg/m² auto-HCT. On day +9, as neutrophils recover, he has fever, rash, weight gain and lung infiltrates; cultures are negative. Next step?</a:t>
             </a:r>
             <a:endParaRPr lang="en-US" sz="1900" dirty="0"/>
           </a:p>

--- a/slides/decks/s27-myeloma-plasma-cell.pptx
+++ b/slides/decks/s27-myeloma-plasma-cell.pptx
@@ -135,13 +135,13 @@
   <p:extLst>
     <p:ext uri="{521415D9-36F7-43E2-AB2F-B90AF26B5E84}">
       <p14:sectionLst xmlns:p14="http://schemas.microsoft.com/office/powerpoint/2010/main">
-        <p14:section name="Opening" id="{3db0ee06-9519-3e10-1db4-60b6ba5a999c}">
+        <p14:section name="Opening" id="{0e04a41e-cdd3-5378-aee6-3990b5234206}">
           <p14:sldIdLst>
             <p14:sldId id="256"/>
             <p14:sldId id="257"/>
           </p14:sldIdLst>
         </p14:section>
-        <p14:section name="Myeloma: first line" id="{2e6a7257-a7bf-cfef-d69f-1a433968fdcd}">
+        <p14:section name="Myeloma: first line" id="{9f38e61b-0589-6afa-0056-b8c0c1768087}">
           <p14:sldIdLst>
             <p14:sldId id="258"/>
             <p14:sldId id="259"/>
@@ -151,27 +151,27 @@
             <p14:sldId id="263"/>
           </p14:sldIdLst>
         </p14:section>
-        <p14:section name="Myeloma: relapse" id="{f35d7b79-2303-951c-4d21-2ae37d81f7d1}">
+        <p14:section name="Myeloma: relapse" id="{8740d4ba-23e9-1367-239b-6fb8a985a802}">
           <p14:sldIdLst>
             <p14:sldId id="264"/>
             <p14:sldId id="265"/>
           </p14:sldIdLst>
         </p14:section>
-        <p14:section name="AL amyloidosis" id="{d735357e-af3c-a882-5b6a-8f1d095b58c2}">
+        <p14:section name="AL amyloidosis" id="{3d70e23a-1ced-e593-2d5e-42d40a995154}">
           <p14:sldIdLst>
             <p14:sldId id="266"/>
             <p14:sldId id="267"/>
             <p14:sldId id="268"/>
           </p14:sldIdLst>
         </p14:section>
-        <p14:section name="POEMS and MIDD" id="{248b3bad-85ca-578f-f28a-683281d0fd08}">
+        <p14:section name="POEMS and MIDD" id="{5d76b3e7-a47f-8108-9301-a68c061164e3}">
           <p14:sldIdLst>
             <p14:sldId id="269"/>
             <p14:sldId id="270"/>
             <p14:sldId id="271"/>
           </p14:sldIdLst>
         </p14:section>
-        <p14:section name="Board questions" id="{2d059c99-d025-abff-81de-9bc21afc5789}">
+        <p14:section name="Board questions" id="{2e74d357-6015-d225-8d2d-431d8fba3a20}">
           <p14:sldIdLst>
             <p14:sldId id="272"/>
             <p14:sldId id="273"/>
@@ -181,14 +181,14 @@
             <p14:sldId id="277"/>
           </p14:sldIdLst>
         </p14:section>
-        <p14:section name="References" id="{577c9182-0645-6bd0-01b0-aef1ea8cf9df}">
+        <p14:section name="References" id="{c55a85e7-5883-7d4c-db23-29d7000479cc}">
           <p14:sldIdLst>
             <p14:sldId id="278"/>
             <p14:sldId id="279"/>
             <p14:sldId id="280"/>
           </p14:sldIdLst>
         </p14:section>
-        <p14:section name="Backup" id="{dbce1548-9c6a-a233-25da-fa62dd4c57b8}">
+        <p14:section name="Backup" id="{e812cb78-f0e5-c44f-55dd-85b08be306e8}">
           <p14:sldIdLst>
             <p14:sldId id="281"/>
             <p14:sldId id="282"/>
